--- a/docs/ai-image-block-redesign.pptx
+++ b/docs/ai-image-block-redesign.pptx
@@ -8,7 +8,7 @@
     <p:notesMasterId r:id="rId18"/>
   </p:notesMasterIdLst>
   <p:sldIdLst>
-    <p:sldId id="256" r:id="rId2"/>
+    <p:sldId id="272" r:id="rId2"/>
     <p:sldId id="271" r:id="rId3"/>
     <p:sldId id="257" r:id="rId4"/>
     <p:sldId id="258" r:id="rId5"/>
@@ -23,7 +23,7 @@
     <p:sldId id="266" r:id="rId14"/>
     <p:sldId id="267" r:id="rId15"/>
     <p:sldId id="268" r:id="rId16"/>
-    <p:sldId id="269" r:id="rId17"/>
+    <p:sldId id="273" r:id="rId17"/>
   </p:sldIdLst>
   <p:sldSz cx="12192000" cy="6858000"/>
   <p:notesSz cx="6858000" cy="12192000"/>
@@ -130,7 +130,7 @@
 <file path=ppt/revisionInfo.xml><?xml version="1.0" encoding="utf-8"?>
 <p1510:revInfo xmlns:a="http://schemas.openxmlformats.org/drawingml/2006/main" xmlns:r="http://schemas.openxmlformats.org/officeDocument/2006/relationships" xmlns:p1510="http://schemas.microsoft.com/office/powerpoint/2015/10/main">
   <p1510:revLst>
-    <p1510:client id="{0FAA424D-5B58-0045-911B-D344DE47C9EF}" v="14" dt="2026-08-21T08:56:34.645"/>
+    <p1510:client id="{0FAA424D-5B58-0045-911B-D344DE47C9EF}" v="2" dt="2026-08-24T08:20:44.035"/>
   </p1510:revLst>
 </p1510:revInfo>
 </file>
@@ -139,11 +139,18 @@
 <pc:chgInfo xmlns:a="http://schemas.openxmlformats.org/drawingml/2006/main" xmlns:r="http://schemas.openxmlformats.org/officeDocument/2006/relationships" xmlns:ac="http://schemas.microsoft.com/office/drawing/2013/main/command" xmlns:pc="http://schemas.microsoft.com/office/powerpoint/2013/main/command">
   <pc:docChgLst>
     <pc:chgData name="Franck Sevin" userId="82d950c0-7bb5-4310-a4fc-a877d4bbe588" providerId="ADAL" clId="{EB9E244D-3F8B-59DF-801C-03BB392BC6F1}"/>
-    <pc:docChg chg="custSel addSld modSld">
-      <pc:chgData name="Franck Sevin" userId="82d950c0-7bb5-4310-a4fc-a877d4bbe588" providerId="ADAL" clId="{EB9E244D-3F8B-59DF-801C-03BB392BC6F1}" dt="2026-08-21T08:56:44.603" v="185" actId="113"/>
+    <pc:docChg chg="custSel addSld delSld modSld">
+      <pc:chgData name="Franck Sevin" userId="82d950c0-7bb5-4310-a4fc-a877d4bbe588" providerId="ADAL" clId="{EB9E244D-3F8B-59DF-801C-03BB392BC6F1}" dt="2026-08-24T08:21:03.631" v="190" actId="2696"/>
       <pc:docMkLst>
         <pc:docMk/>
       </pc:docMkLst>
+      <pc:sldChg chg="del">
+        <pc:chgData name="Franck Sevin" userId="82d950c0-7bb5-4310-a4fc-a877d4bbe588" providerId="ADAL" clId="{EB9E244D-3F8B-59DF-801C-03BB392BC6F1}" dt="2026-08-24T08:20:33.609" v="188" actId="2696"/>
+        <pc:sldMkLst>
+          <pc:docMk/>
+          <pc:sldMk cId="0" sldId="256"/>
+        </pc:sldMkLst>
+      </pc:sldChg>
       <pc:sldChg chg="modSp mod">
         <pc:chgData name="Franck Sevin" userId="82d950c0-7bb5-4310-a4fc-a877d4bbe588" providerId="ADAL" clId="{EB9E244D-3F8B-59DF-801C-03BB392BC6F1}" dt="2026-08-21T08:51:18.407" v="6" actId="27636"/>
         <pc:sldMkLst>
@@ -189,6 +196,13 @@
           </ac:spMkLst>
         </pc:spChg>
       </pc:sldChg>
+      <pc:sldChg chg="del">
+        <pc:chgData name="Franck Sevin" userId="82d950c0-7bb5-4310-a4fc-a877d4bbe588" providerId="ADAL" clId="{EB9E244D-3F8B-59DF-801C-03BB392BC6F1}" dt="2026-08-24T08:21:03.631" v="190" actId="2696"/>
+        <pc:sldMkLst>
+          <pc:docMk/>
+          <pc:sldMk cId="0" sldId="269"/>
+        </pc:sldMkLst>
+      </pc:sldChg>
       <pc:sldChg chg="addSp modSp new mod">
         <pc:chgData name="Franck Sevin" userId="82d950c0-7bb5-4310-a4fc-a877d4bbe588" providerId="ADAL" clId="{EB9E244D-3F8B-59DF-801C-03BB392BC6F1}" dt="2026-08-20T06:48:59.223" v="3" actId="14100"/>
         <pc:sldMkLst>
@@ -205,19 +219,33 @@
         </pc:picChg>
       </pc:sldChg>
       <pc:sldChg chg="addSp modSp new mod">
-        <pc:chgData name="Franck Sevin" userId="82d950c0-7bb5-4310-a4fc-a877d4bbe588" providerId="ADAL" clId="{EB9E244D-3F8B-59DF-801C-03BB392BC6F1}" dt="2026-08-21T08:56:44.603" v="185" actId="113"/>
+        <pc:chgData name="Franck Sevin" userId="82d950c0-7bb5-4310-a4fc-a877d4bbe588" providerId="ADAL" clId="{EB9E244D-3F8B-59DF-801C-03BB392BC6F1}" dt="2026-08-24T08:18:43.390" v="186" actId="113"/>
         <pc:sldMkLst>
           <pc:docMk/>
           <pc:sldMk cId="3244134365" sldId="271"/>
         </pc:sldMkLst>
         <pc:spChg chg="add mod">
-          <ac:chgData name="Franck Sevin" userId="82d950c0-7bb5-4310-a4fc-a877d4bbe588" providerId="ADAL" clId="{EB9E244D-3F8B-59DF-801C-03BB392BC6F1}" dt="2026-08-21T08:56:44.603" v="185" actId="113"/>
+          <ac:chgData name="Franck Sevin" userId="82d950c0-7bb5-4310-a4fc-a877d4bbe588" providerId="ADAL" clId="{EB9E244D-3F8B-59DF-801C-03BB392BC6F1}" dt="2026-08-24T08:18:43.390" v="186" actId="113"/>
           <ac:spMkLst>
             <pc:docMk/>
             <pc:sldMk cId="3244134365" sldId="271"/>
             <ac:spMk id="2" creationId="{FD09D4F8-A76C-4BDB-6BE3-D3AF82BB11AE}"/>
           </ac:spMkLst>
         </pc:spChg>
+      </pc:sldChg>
+      <pc:sldChg chg="add">
+        <pc:chgData name="Franck Sevin" userId="82d950c0-7bb5-4310-a4fc-a877d4bbe588" providerId="ADAL" clId="{EB9E244D-3F8B-59DF-801C-03BB392BC6F1}" dt="2026-08-24T08:20:28.115" v="187"/>
+        <pc:sldMkLst>
+          <pc:docMk/>
+          <pc:sldMk cId="0" sldId="272"/>
+        </pc:sldMkLst>
+      </pc:sldChg>
+      <pc:sldChg chg="add">
+        <pc:chgData name="Franck Sevin" userId="82d950c0-7bb5-4310-a4fc-a877d4bbe588" providerId="ADAL" clId="{EB9E244D-3F8B-59DF-801C-03BB392BC6F1}" dt="2026-08-24T08:20:44.035" v="189"/>
+        <pc:sldMkLst>
+          <pc:docMk/>
+          <pc:sldMk cId="0" sldId="273"/>
+        </pc:sldMkLst>
       </pc:sldChg>
     </pc:docChg>
   </pc:docChgLst>
@@ -414,7 +442,7 @@
           <a:p>
             <a:fld id="{F7021451-1387-4CA6-816F-3879F97B5CBC}" type="slidenum">
               <a:rPr lang="en-US"/>
-              <a:t>1</a:t>
+              <a:t>3</a:t>
             </a:fld>
             <a:endParaRPr lang="en-US"/>
           </a:p>
@@ -498,7 +526,7 @@
           <a:p>
             <a:fld id="{F7021451-1387-4CA6-816F-3879F97B5CBC}" type="slidenum">
               <a:rPr lang="en-US"/>
-              <a:t>12</a:t>
+              <a:t>13</a:t>
             </a:fld>
             <a:endParaRPr lang="en-US"/>
           </a:p>
@@ -582,7 +610,7 @@
           <a:p>
             <a:fld id="{F7021451-1387-4CA6-816F-3879F97B5CBC}" type="slidenum">
               <a:rPr lang="en-US"/>
-              <a:t>13</a:t>
+              <a:t>14</a:t>
             </a:fld>
             <a:endParaRPr lang="en-US"/>
           </a:p>
@@ -666,175 +694,7 @@
           <a:p>
             <a:fld id="{F7021451-1387-4CA6-816F-3879F97B5CBC}" type="slidenum">
               <a:rPr lang="en-US"/>
-              <a:t>14</a:t>
-            </a:fld>
-            <a:endParaRPr lang="en-US"/>
-          </a:p>
-        </p:txBody>
-      </p:sp>
-    </p:spTree>
-    <p:extLst>
-      <p:ext uri="{BB962C8B-B14F-4D97-AF65-F5344CB8AC3E}">
-        <p14:creationId xmlns:p14="http://schemas.microsoft.com/office/powerpoint/2010/main" val="1024086991"/>
-      </p:ext>
-    </p:extLst>
-  </p:cSld>
-  <p:clrMapOvr>
-    <a:masterClrMapping/>
-  </p:clrMapOvr>
-</p:notes>
-</file>
-
-<file path=ppt/notesSlides/notesSlide13.xml><?xml version="1.0" encoding="utf-8"?>
-<p:notes xmlns:a="http://schemas.openxmlformats.org/drawingml/2006/main" xmlns:r="http://schemas.openxmlformats.org/officeDocument/2006/relationships" xmlns:p="http://schemas.openxmlformats.org/presentationml/2006/main">
-  <p:cSld>
-    <p:spTree>
-      <p:nvGrpSpPr>
-        <p:cNvPr id="1" name=""/>
-        <p:cNvGrpSpPr/>
-        <p:nvPr/>
-      </p:nvGrpSpPr>
-      <p:grpSpPr>
-        <a:xfrm>
-          <a:off x="0" y="0"/>
-          <a:ext cx="0" cy="0"/>
-          <a:chOff x="0" y="0"/>
-          <a:chExt cx="0" cy="0"/>
-        </a:xfrm>
-      </p:grpSpPr>
-      <p:sp>
-        <p:nvSpPr>
-          <p:cNvPr id="2" name="Slide Image Placeholder 1"/>
-          <p:cNvSpPr>
-            <a:spLocks noGrp="1" noRot="1" noChangeAspect="1"/>
-          </p:cNvSpPr>
-          <p:nvPr>
-            <p:ph type="sldImg"/>
-          </p:nvPr>
-        </p:nvSpPr>
-        <p:spPr/>
-      </p:sp>
-      <p:sp>
-        <p:nvSpPr>
-          <p:cNvPr id="3" name="Notes Placeholder 2"/>
-          <p:cNvSpPr>
-            <a:spLocks noGrp="1"/>
-          </p:cNvSpPr>
-          <p:nvPr>
-            <p:ph type="body" idx="1"/>
-          </p:nvPr>
-        </p:nvSpPr>
-        <p:spPr/>
-        <p:txBody>
-          <a:bodyPr/>
-          <a:lstStyle/>
-          <a:p>
-            <a:endParaRPr lang="en-US" dirty="0"/>
-          </a:p>
-        </p:txBody>
-      </p:sp>
-      <p:sp>
-        <p:nvSpPr>
-          <p:cNvPr id="4" name="Slide Number Placeholder 3"/>
-          <p:cNvSpPr>
-            <a:spLocks noGrp="1"/>
-          </p:cNvSpPr>
-          <p:nvPr>
-            <p:ph type="sldNum" sz="quarter" idx="10"/>
-          </p:nvPr>
-        </p:nvSpPr>
-        <p:spPr/>
-        <p:txBody>
-          <a:bodyPr/>
-          <a:lstStyle/>
-          <a:p>
-            <a:fld id="{F7021451-1387-4CA6-816F-3879F97B5CBC}" type="slidenum">
-              <a:rPr lang="en-US"/>
               <a:t>15</a:t>
-            </a:fld>
-            <a:endParaRPr lang="en-US"/>
-          </a:p>
-        </p:txBody>
-      </p:sp>
-    </p:spTree>
-    <p:extLst>
-      <p:ext uri="{BB962C8B-B14F-4D97-AF65-F5344CB8AC3E}">
-        <p14:creationId xmlns:p14="http://schemas.microsoft.com/office/powerpoint/2010/main" val="1024086991"/>
-      </p:ext>
-    </p:extLst>
-  </p:cSld>
-  <p:clrMapOvr>
-    <a:masterClrMapping/>
-  </p:clrMapOvr>
-</p:notes>
-</file>
-
-<file path=ppt/notesSlides/notesSlide14.xml><?xml version="1.0" encoding="utf-8"?>
-<p:notes xmlns:a="http://schemas.openxmlformats.org/drawingml/2006/main" xmlns:r="http://schemas.openxmlformats.org/officeDocument/2006/relationships" xmlns:p="http://schemas.openxmlformats.org/presentationml/2006/main">
-  <p:cSld>
-    <p:spTree>
-      <p:nvGrpSpPr>
-        <p:cNvPr id="1" name=""/>
-        <p:cNvGrpSpPr/>
-        <p:nvPr/>
-      </p:nvGrpSpPr>
-      <p:grpSpPr>
-        <a:xfrm>
-          <a:off x="0" y="0"/>
-          <a:ext cx="0" cy="0"/>
-          <a:chOff x="0" y="0"/>
-          <a:chExt cx="0" cy="0"/>
-        </a:xfrm>
-      </p:grpSpPr>
-      <p:sp>
-        <p:nvSpPr>
-          <p:cNvPr id="2" name="Slide Image Placeholder 1"/>
-          <p:cNvSpPr>
-            <a:spLocks noGrp="1" noRot="1" noChangeAspect="1"/>
-          </p:cNvSpPr>
-          <p:nvPr>
-            <p:ph type="sldImg"/>
-          </p:nvPr>
-        </p:nvSpPr>
-        <p:spPr/>
-      </p:sp>
-      <p:sp>
-        <p:nvSpPr>
-          <p:cNvPr id="3" name="Notes Placeholder 2"/>
-          <p:cNvSpPr>
-            <a:spLocks noGrp="1"/>
-          </p:cNvSpPr>
-          <p:nvPr>
-            <p:ph type="body" idx="1"/>
-          </p:nvPr>
-        </p:nvSpPr>
-        <p:spPr/>
-        <p:txBody>
-          <a:bodyPr/>
-          <a:lstStyle/>
-          <a:p>
-            <a:endParaRPr lang="en-US" dirty="0"/>
-          </a:p>
-        </p:txBody>
-      </p:sp>
-      <p:sp>
-        <p:nvSpPr>
-          <p:cNvPr id="4" name="Slide Number Placeholder 3"/>
-          <p:cNvSpPr>
-            <a:spLocks noGrp="1"/>
-          </p:cNvSpPr>
-          <p:nvPr>
-            <p:ph type="sldNum" sz="quarter" idx="10"/>
-          </p:nvPr>
-        </p:nvSpPr>
-        <p:spPr/>
-        <p:txBody>
-          <a:bodyPr/>
-          <a:lstStyle/>
-          <a:p>
-            <a:fld id="{F7021451-1387-4CA6-816F-3879F97B5CBC}" type="slidenum">
-              <a:rPr lang="en-US"/>
-              <a:t>16</a:t>
             </a:fld>
             <a:endParaRPr lang="en-US"/>
           </a:p>
@@ -918,7 +778,7 @@
           <a:p>
             <a:fld id="{F7021451-1387-4CA6-816F-3879F97B5CBC}" type="slidenum">
               <a:rPr lang="en-US"/>
-              <a:t>3</a:t>
+              <a:t>4</a:t>
             </a:fld>
             <a:endParaRPr lang="en-US"/>
           </a:p>
@@ -1002,7 +862,7 @@
           <a:p>
             <a:fld id="{F7021451-1387-4CA6-816F-3879F97B5CBC}" type="slidenum">
               <a:rPr lang="en-US"/>
-              <a:t>4</a:t>
+              <a:t>5</a:t>
             </a:fld>
             <a:endParaRPr lang="en-US"/>
           </a:p>
@@ -1086,7 +946,7 @@
           <a:p>
             <a:fld id="{F7021451-1387-4CA6-816F-3879F97B5CBC}" type="slidenum">
               <a:rPr lang="en-US"/>
-              <a:t>5</a:t>
+              <a:t>7</a:t>
             </a:fld>
             <a:endParaRPr lang="en-US"/>
           </a:p>
@@ -1170,7 +1030,7 @@
           <a:p>
             <a:fld id="{F7021451-1387-4CA6-816F-3879F97B5CBC}" type="slidenum">
               <a:rPr lang="en-US"/>
-              <a:t>7</a:t>
+              <a:t>8</a:t>
             </a:fld>
             <a:endParaRPr lang="en-US"/>
           </a:p>
@@ -1254,7 +1114,7 @@
           <a:p>
             <a:fld id="{F7021451-1387-4CA6-816F-3879F97B5CBC}" type="slidenum">
               <a:rPr lang="en-US"/>
-              <a:t>8</a:t>
+              <a:t>9</a:t>
             </a:fld>
             <a:endParaRPr lang="en-US"/>
           </a:p>
@@ -1338,7 +1198,7 @@
           <a:p>
             <a:fld id="{F7021451-1387-4CA6-816F-3879F97B5CBC}" type="slidenum">
               <a:rPr lang="en-US"/>
-              <a:t>9</a:t>
+              <a:t>10</a:t>
             </a:fld>
             <a:endParaRPr lang="en-US"/>
           </a:p>
@@ -1422,7 +1282,7 @@
           <a:p>
             <a:fld id="{F7021451-1387-4CA6-816F-3879F97B5CBC}" type="slidenum">
               <a:rPr lang="en-US"/>
-              <a:t>10</a:t>
+              <a:t>11</a:t>
             </a:fld>
             <a:endParaRPr lang="en-US"/>
           </a:p>
@@ -1506,7 +1366,7 @@
           <a:p>
             <a:fld id="{F7021451-1387-4CA6-816F-3879F97B5CBC}" type="slidenum">
               <a:rPr lang="en-US"/>
-              <a:t>11</a:t>
+              <a:t>12</a:t>
             </a:fld>
             <a:endParaRPr lang="en-US"/>
           </a:p>
@@ -1555,6 +1415,101 @@
 </p:sldLayout>
 </file>
 
+<file path=ppt/slideLayouts/slideLayout2.xml><?xml version="1.0" encoding="utf-8"?>
+<p:sldLayout xmlns:a="http://schemas.openxmlformats.org/drawingml/2006/main" xmlns:r="http://schemas.openxmlformats.org/officeDocument/2006/relationships" xmlns:p="http://schemas.openxmlformats.org/presentationml/2006/main" type="blank">
+  <p:cSld name="Blank">
+    <p:spTree>
+      <p:nvGrpSpPr>
+        <p:cNvPr id="1" name=""/>
+        <p:cNvGrpSpPr/>
+        <p:nvPr/>
+      </p:nvGrpSpPr>
+      <p:grpSpPr>
+        <a:xfrm>
+          <a:off x="0" y="0"/>
+          <a:ext cx="0" cy="0"/>
+          <a:chOff x="0" y="0"/>
+          <a:chExt cx="0" cy="0"/>
+        </a:xfrm>
+      </p:grpSpPr>
+      <p:sp>
+        <p:nvSpPr>
+          <p:cNvPr id="2" name="Date Placeholder 1"/>
+          <p:cNvSpPr>
+            <a:spLocks noGrp="1"/>
+          </p:cNvSpPr>
+          <p:nvPr>
+            <p:ph type="dt" sz="half" idx="10"/>
+          </p:nvPr>
+        </p:nvSpPr>
+        <p:spPr/>
+        <p:txBody>
+          <a:bodyPr/>
+          <a:lstStyle/>
+          <a:p>
+            <a:fld id="{5BCAD085-E8A6-8845-BD4E-CB4CCA059FC4}" type="datetimeFigureOut">
+              <a:rPr lang="en-US" smtClean="0"/>
+              <a:t>8/24/26</a:t>
+            </a:fld>
+            <a:endParaRPr lang="en-US"/>
+          </a:p>
+        </p:txBody>
+      </p:sp>
+      <p:sp>
+        <p:nvSpPr>
+          <p:cNvPr id="3" name="Footer Placeholder 2"/>
+          <p:cNvSpPr>
+            <a:spLocks noGrp="1"/>
+          </p:cNvSpPr>
+          <p:nvPr>
+            <p:ph type="ftr" sz="quarter" idx="11"/>
+          </p:nvPr>
+        </p:nvSpPr>
+        <p:spPr/>
+        <p:txBody>
+          <a:bodyPr/>
+          <a:lstStyle/>
+          <a:p>
+            <a:endParaRPr lang="en-US"/>
+          </a:p>
+        </p:txBody>
+      </p:sp>
+      <p:sp>
+        <p:nvSpPr>
+          <p:cNvPr id="4" name="Slide Number Placeholder 3"/>
+          <p:cNvSpPr>
+            <a:spLocks noGrp="1"/>
+          </p:cNvSpPr>
+          <p:nvPr>
+            <p:ph type="sldNum" sz="quarter" idx="12"/>
+          </p:nvPr>
+        </p:nvSpPr>
+        <p:spPr/>
+        <p:txBody>
+          <a:bodyPr/>
+          <a:lstStyle/>
+          <a:p>
+            <a:fld id="{C1FF6DA9-008F-8B48-92A6-B652298478BF}" type="slidenum">
+              <a:rPr lang="en-US" smtClean="0"/>
+              <a:t>‹#›</a:t>
+            </a:fld>
+            <a:endParaRPr lang="en-US"/>
+          </a:p>
+        </p:txBody>
+      </p:sp>
+    </p:spTree>
+    <p:extLst>
+      <p:ext uri="{BB962C8B-B14F-4D97-AF65-F5344CB8AC3E}">
+        <p14:creationId xmlns:p14="http://schemas.microsoft.com/office/powerpoint/2010/main" val="3987027787"/>
+      </p:ext>
+    </p:extLst>
+  </p:cSld>
+  <p:clrMapOvr>
+    <a:masterClrMapping/>
+  </p:clrMapOvr>
+</p:sldLayout>
+</file>
+
 <file path=ppt/slideMasters/slideMaster1.xml><?xml version="1.0" encoding="utf-8"?>
 <p:sldMaster xmlns:a="http://schemas.openxmlformats.org/drawingml/2006/main" xmlns:r="http://schemas.openxmlformats.org/officeDocument/2006/relationships" xmlns:p="http://schemas.openxmlformats.org/presentationml/2006/main">
   <p:cSld>
@@ -1582,6 +1537,7 @@
   <p:clrMap bg1="lt1" tx1="dk1" bg2="lt2" tx2="dk2" accent1="accent1" accent2="accent2" accent3="accent3" accent4="accent4" accent5="accent5" accent6="accent6" hlink="hlink" folHlink="folHlink"/>
   <p:sldLayoutIdLst>
     <p:sldLayoutId id="2147483649" r:id="rId1"/>
+    <p:sldLayoutId id="2147483650" r:id="rId2"/>
   </p:sldLayoutIdLst>
   <p:hf sldNum="0" hdr="0" ftr="0" dt="0"/>
   <p:txStyles>
@@ -1839,15 +1795,7 @@
 
 <file path=ppt/slides/slide1.xml><?xml version="1.0" encoding="utf-8"?>
 <p:sld xmlns:a="http://schemas.openxmlformats.org/drawingml/2006/main" xmlns:r="http://schemas.openxmlformats.org/officeDocument/2006/relationships" xmlns:p="http://schemas.openxmlformats.org/presentationml/2006/main">
-  <p:cSld name="Slide 1">
-    <p:bg>
-      <p:bgPr>
-        <a:solidFill>
-          <a:srgbClr val="141414"/>
-        </a:solidFill>
-        <a:effectLst/>
-      </p:bgPr>
-    </p:bg>
+  <p:cSld>
     <p:spTree>
       <p:nvGrpSpPr>
         <p:cNvPr id="1" name=""/>
@@ -1862,522 +1810,183 @@
           <a:chExt cx="0" cy="0"/>
         </a:xfrm>
       </p:grpSpPr>
-      <p:pic>
-        <p:nvPicPr>
-          <p:cNvPr id="2" name="Image 0" descr="preencoded.png"/>
-          <p:cNvPicPr>
-            <a:picLocks noChangeAspect="1"/>
-          </p:cNvPicPr>
-          <p:nvPr/>
-        </p:nvPicPr>
-        <p:blipFill>
-          <a:blip>
-            <a:extLst>
-              <a:ext uri="{96DAC541-7B7A-43D3-8B79-37D633B846F1}">
-                <asvg:svgBlip xmlns:asvg="http://schemas.microsoft.com/office/drawing/2016/SVG/main" r:embed="rId3"/>
-              </a:ext>
-            </a:extLst>
-          </a:blip>
-          <a:stretch>
-            <a:fillRect/>
-          </a:stretch>
-        </p:blipFill>
-        <p:spPr>
-          <a:xfrm>
-            <a:off x="0" y="0"/>
-            <a:ext cx="12191695" cy="6858000"/>
-          </a:xfrm>
-          <a:prstGeom prst="rect">
-            <a:avLst/>
-          </a:prstGeom>
-        </p:spPr>
-      </p:pic>
-      <p:sp>
-        <p:nvSpPr>
-          <p:cNvPr id="3" name="Text 0"/>
-          <p:cNvSpPr/>
-          <p:nvPr/>
-        </p:nvSpPr>
-        <p:spPr>
-          <a:xfrm>
-            <a:off x="749808" y="667512"/>
-            <a:ext cx="2194560" cy="219456"/>
-          </a:xfrm>
-          <a:prstGeom prst="rect">
-            <a:avLst/>
-          </a:prstGeom>
-          <a:noFill/>
-          <a:ln/>
-        </p:spPr>
-        <p:txBody>
-          <a:bodyPr wrap="square" lIns="0" tIns="0" rIns="0" bIns="0" rtlCol="0" anchor="ctr"/>
-          <a:lstStyle/>
-          <a:p>
-            <a:pPr marL="0" indent="0">
-              <a:buNone/>
-            </a:pPr>
-            <a:r>
-              <a:rPr lang="en-US" sz="1400" b="1" dirty="0">
+      <p:sp>
+        <p:nvSpPr>
+          <p:cNvPr id="2" name="Rectangle 1"/>
+          <p:cNvSpPr/>
+          <p:nvPr/>
+        </p:nvSpPr>
+        <p:spPr>
+          <a:xfrm>
+            <a:off x="1588" y="0"/>
+            <a:ext cx="12188952" cy="6858000"/>
+          </a:xfrm>
+          <a:prstGeom prst="rect">
+            <a:avLst/>
+          </a:prstGeom>
+          <a:solidFill>
+            <a:srgbClr val="FF0000"/>
+          </a:solidFill>
+          <a:ln>
+            <a:noFill/>
+          </a:ln>
+        </p:spPr>
+        <p:style>
+          <a:lnRef idx="1">
+            <a:schemeClr val="accent1"/>
+          </a:lnRef>
+          <a:fillRef idx="3">
+            <a:schemeClr val="accent1"/>
+          </a:fillRef>
+          <a:effectRef idx="2">
+            <a:schemeClr val="accent1"/>
+          </a:effectRef>
+          <a:fontRef idx="minor">
+            <a:schemeClr val="lt1"/>
+          </a:fontRef>
+        </p:style>
+        <p:txBody>
+          <a:bodyPr rtlCol="0" anchor="ctr"/>
+          <a:lstStyle/>
+          <a:p>
+            <a:pPr algn="ctr"/>
+            <a:endParaRPr/>
+          </a:p>
+        </p:txBody>
+      </p:sp>
+      <p:sp>
+        <p:nvSpPr>
+          <p:cNvPr id="3" name="TextBox 2"/>
+          <p:cNvSpPr txBox="1"/>
+          <p:nvPr/>
+        </p:nvSpPr>
+        <p:spPr>
+          <a:xfrm>
+            <a:off x="550228" y="2560320"/>
+            <a:ext cx="8229600" cy="707886"/>
+          </a:xfrm>
+          <a:prstGeom prst="rect">
+            <a:avLst/>
+          </a:prstGeom>
+          <a:noFill/>
+        </p:spPr>
+        <p:txBody>
+          <a:bodyPr wrap="square">
+            <a:spAutoFit/>
+          </a:bodyPr>
+          <a:lstStyle/>
+          <a:p>
+            <a:pPr algn="l"/>
+            <a:r>
+              <a:rPr sz="4000">
                 <a:solidFill>
                   <a:srgbClr val="FFFFFF"/>
                 </a:solidFill>
               </a:rPr>
-              <a:t>Adobe Experience Manager</a:t>
-            </a:r>
-            <a:endParaRPr lang="en-US" sz="1400" dirty="0"/>
-          </a:p>
-        </p:txBody>
-      </p:sp>
-      <p:sp>
-        <p:nvSpPr>
-          <p:cNvPr id="4" name="Text 1"/>
-          <p:cNvSpPr/>
-          <p:nvPr/>
-        </p:nvSpPr>
-        <p:spPr>
-          <a:xfrm>
-            <a:off x="749808" y="1783080"/>
-            <a:ext cx="3840480" cy="640080"/>
-          </a:xfrm>
-          <a:prstGeom prst="rect">
-            <a:avLst/>
-          </a:prstGeom>
-          <a:noFill/>
-          <a:ln/>
-        </p:spPr>
-        <p:txBody>
-          <a:bodyPr wrap="square" lIns="0" tIns="0" rIns="0" bIns="0" rtlCol="0" anchor="ctr"/>
-          <a:lstStyle/>
-          <a:p>
-            <a:pPr marL="0" indent="0">
-              <a:buNone/>
-            </a:pPr>
-            <a:r>
-              <a:rPr lang="en-US" sz="2800" b="1" dirty="0">
+              <a:t>The ai-image Block</a:t>
+            </a:r>
+          </a:p>
+        </p:txBody>
+      </p:sp>
+      <p:sp>
+        <p:nvSpPr>
+          <p:cNvPr id="4" name="TextBox 3"/>
+          <p:cNvSpPr txBox="1"/>
+          <p:nvPr/>
+        </p:nvSpPr>
+        <p:spPr>
+          <a:xfrm>
+            <a:off x="550228" y="3429000"/>
+            <a:ext cx="10058400" cy="400110"/>
+          </a:xfrm>
+          <a:prstGeom prst="rect">
+            <a:avLst/>
+          </a:prstGeom>
+          <a:noFill/>
+        </p:spPr>
+        <p:txBody>
+          <a:bodyPr wrap="square">
+            <a:spAutoFit/>
+          </a:bodyPr>
+          <a:lstStyle/>
+          <a:p>
+            <a:pPr algn="l"/>
+            <a:r>
+              <a:rPr sz="2000" b="1">
                 <a:solidFill>
                   <a:srgbClr val="FFFFFF"/>
                 </a:solidFill>
               </a:rPr>
-              <a:t>The ai-image Block</a:t>
-            </a:r>
-            <a:endParaRPr lang="en-US" sz="2800" dirty="0"/>
-          </a:p>
-        </p:txBody>
-      </p:sp>
-      <p:sp>
-        <p:nvSpPr>
-          <p:cNvPr id="5" name="Text 2"/>
-          <p:cNvSpPr/>
-          <p:nvPr/>
-        </p:nvSpPr>
-        <p:spPr>
-          <a:xfrm>
-            <a:off x="749808" y="2505456"/>
-            <a:ext cx="3840480" cy="502920"/>
-          </a:xfrm>
-          <a:prstGeom prst="rect">
-            <a:avLst/>
-          </a:prstGeom>
-          <a:noFill/>
-          <a:ln/>
-        </p:spPr>
-        <p:txBody>
-          <a:bodyPr wrap="square" lIns="0" tIns="0" rIns="0" bIns="0" rtlCol="0" anchor="ctr"/>
-          <a:lstStyle/>
-          <a:p>
-            <a:pPr marL="0" indent="0">
-              <a:buNone/>
-            </a:pPr>
-            <a:r>
-              <a:rPr lang="en-US" sz="1300" b="1" dirty="0">
-                <a:solidFill>
-                  <a:srgbClr val="FFF0F0"/>
-                </a:solidFill>
-              </a:rPr>
-              <a:t>Author-generated, DAM-persisted Firefly images in Universal Editor</a:t>
-            </a:r>
-            <a:endParaRPr lang="en-US" sz="1300" dirty="0"/>
-          </a:p>
-        </p:txBody>
-      </p:sp>
-      <p:sp>
-        <p:nvSpPr>
-          <p:cNvPr id="6" name="Text 3"/>
-          <p:cNvSpPr/>
-          <p:nvPr/>
-        </p:nvSpPr>
-        <p:spPr>
-          <a:xfrm>
-            <a:off x="749808" y="2971800"/>
-            <a:ext cx="3474720" cy="256032"/>
-          </a:xfrm>
-          <a:prstGeom prst="rect">
-            <a:avLst/>
-          </a:prstGeom>
-          <a:noFill/>
-          <a:ln/>
-        </p:spPr>
-        <p:txBody>
-          <a:bodyPr wrap="square" lIns="0" tIns="0" rIns="0" bIns="0" rtlCol="0" anchor="ctr"/>
-          <a:lstStyle/>
-          <a:p>
-            <a:pPr marL="0" indent="0">
-              <a:buNone/>
-            </a:pPr>
-            <a:r>
-              <a:rPr lang="en-US" sz="1050" dirty="0">
-                <a:solidFill>
-                  <a:srgbClr val="FFE5E2"/>
-                </a:solidFill>
-              </a:rPr>
-              <a:t>Illustrated redesign for an Adobe team share-out</a:t>
-            </a:r>
-            <a:endParaRPr lang="en-US" sz="1050" dirty="0"/>
-          </a:p>
-        </p:txBody>
-      </p:sp>
-      <p:sp>
-        <p:nvSpPr>
-          <p:cNvPr id="7" name="Shape 4"/>
-          <p:cNvSpPr/>
-          <p:nvPr/>
-        </p:nvSpPr>
-        <p:spPr>
-          <a:xfrm>
-            <a:off x="749808" y="3456432"/>
-            <a:ext cx="1280160" cy="274320"/>
-          </a:xfrm>
-          <a:prstGeom prst="roundRect">
-            <a:avLst>
-              <a:gd name="adj" fmla="val 26667"/>
-            </a:avLst>
-          </a:prstGeom>
-          <a:solidFill>
-            <a:srgbClr val="FFFFFF"/>
-          </a:solidFill>
-          <a:ln w="12700">
-            <a:solidFill>
-              <a:srgbClr val="FFFFFF"/>
-            </a:solidFill>
-            <a:prstDash val="solid"/>
-          </a:ln>
-        </p:spPr>
-        <p:txBody>
-          <a:bodyPr/>
-          <a:lstStyle/>
-          <a:p>
-            <a:endParaRPr lang="en-US"/>
-          </a:p>
-        </p:txBody>
-      </p:sp>
-      <p:sp>
-        <p:nvSpPr>
-          <p:cNvPr id="8" name="Text 5"/>
-          <p:cNvSpPr/>
-          <p:nvPr/>
-        </p:nvSpPr>
-        <p:spPr>
-          <a:xfrm>
-            <a:off x="749808" y="3461004"/>
-            <a:ext cx="1280160" cy="274320"/>
-          </a:xfrm>
-          <a:prstGeom prst="rect">
-            <a:avLst/>
-          </a:prstGeom>
-          <a:noFill/>
-          <a:ln/>
-        </p:spPr>
-        <p:txBody>
-          <a:bodyPr wrap="square" lIns="0" tIns="0" rIns="0" bIns="0" rtlCol="0" anchor="ctr"/>
-          <a:lstStyle/>
-          <a:p>
-            <a:pPr marL="0" indent="0" algn="ctr">
-              <a:buNone/>
-            </a:pPr>
-            <a:r>
-              <a:rPr lang="en-US" sz="850" b="1" dirty="0">
-                <a:solidFill>
-                  <a:srgbClr val="FF1500"/>
-                </a:solidFill>
-                <a:latin typeface="Arial" pitchFamily="34" charset="0"/>
-                <a:ea typeface="Arial" pitchFamily="34" charset="-122"/>
-                <a:cs typeface="Arial" pitchFamily="34" charset="-120"/>
-              </a:rPr>
-              <a:t>Author once</a:t>
-            </a:r>
-            <a:endParaRPr lang="en-US" sz="850" dirty="0"/>
-          </a:p>
-        </p:txBody>
-      </p:sp>
-      <p:sp>
-        <p:nvSpPr>
-          <p:cNvPr id="9" name="Shape 6"/>
-          <p:cNvSpPr/>
-          <p:nvPr/>
-        </p:nvSpPr>
-        <p:spPr>
-          <a:xfrm>
-            <a:off x="2157984" y="3456432"/>
-            <a:ext cx="1371600" cy="274320"/>
-          </a:xfrm>
-          <a:prstGeom prst="roundRect">
-            <a:avLst>
-              <a:gd name="adj" fmla="val 26667"/>
-            </a:avLst>
-          </a:prstGeom>
-          <a:solidFill>
-            <a:srgbClr val="FFFFFF"/>
-          </a:solidFill>
-          <a:ln w="12700">
-            <a:solidFill>
-              <a:srgbClr val="FFFFFF"/>
-            </a:solidFill>
-            <a:prstDash val="solid"/>
-          </a:ln>
-        </p:spPr>
-        <p:txBody>
-          <a:bodyPr/>
-          <a:lstStyle/>
-          <a:p>
-            <a:endParaRPr lang="en-US"/>
-          </a:p>
-        </p:txBody>
-      </p:sp>
-      <p:sp>
-        <p:nvSpPr>
-          <p:cNvPr id="10" name="Text 7"/>
-          <p:cNvSpPr/>
-          <p:nvPr/>
-        </p:nvSpPr>
-        <p:spPr>
-          <a:xfrm>
-            <a:off x="2157984" y="3461004"/>
-            <a:ext cx="1371600" cy="274320"/>
-          </a:xfrm>
-          <a:prstGeom prst="rect">
-            <a:avLst/>
-          </a:prstGeom>
-          <a:noFill/>
-          <a:ln/>
-        </p:spPr>
-        <p:txBody>
-          <a:bodyPr wrap="square" lIns="0" tIns="0" rIns="0" bIns="0" rtlCol="0" anchor="ctr"/>
-          <a:lstStyle/>
-          <a:p>
-            <a:pPr marL="0" indent="0" algn="ctr">
-              <a:buNone/>
-            </a:pPr>
-            <a:r>
-              <a:rPr lang="en-US" sz="850" b="1" dirty="0">
-                <a:solidFill>
-                  <a:srgbClr val="FF1500"/>
-                </a:solidFill>
-                <a:latin typeface="Arial" pitchFamily="34" charset="0"/>
-                <a:ea typeface="Arial" pitchFamily="34" charset="-122"/>
-                <a:cs typeface="Arial" pitchFamily="34" charset="-120"/>
-              </a:rPr>
-              <a:t>Persist in DAM</a:t>
-            </a:r>
-            <a:endParaRPr lang="en-US" sz="850" dirty="0"/>
-          </a:p>
-        </p:txBody>
-      </p:sp>
-      <p:sp>
-        <p:nvSpPr>
-          <p:cNvPr id="11" name="Shape 8"/>
-          <p:cNvSpPr/>
-          <p:nvPr/>
-        </p:nvSpPr>
-        <p:spPr>
-          <a:xfrm>
-            <a:off x="3657600" y="3456432"/>
-            <a:ext cx="1691640" cy="274320"/>
-          </a:xfrm>
-          <a:prstGeom prst="roundRect">
-            <a:avLst>
-              <a:gd name="adj" fmla="val 26667"/>
-            </a:avLst>
-          </a:prstGeom>
-          <a:solidFill>
-            <a:srgbClr val="FFFFFF"/>
-          </a:solidFill>
-          <a:ln w="12700">
-            <a:solidFill>
-              <a:srgbClr val="FFFFFF"/>
-            </a:solidFill>
-            <a:prstDash val="solid"/>
-          </a:ln>
-        </p:spPr>
-        <p:txBody>
-          <a:bodyPr/>
-          <a:lstStyle/>
-          <a:p>
-            <a:endParaRPr lang="en-US"/>
-          </a:p>
-        </p:txBody>
-      </p:sp>
-      <p:sp>
-        <p:nvSpPr>
-          <p:cNvPr id="12" name="Text 9"/>
-          <p:cNvSpPr/>
-          <p:nvPr/>
-        </p:nvSpPr>
-        <p:spPr>
-          <a:xfrm>
-            <a:off x="3657600" y="3461004"/>
-            <a:ext cx="1691640" cy="274320"/>
-          </a:xfrm>
-          <a:prstGeom prst="rect">
-            <a:avLst/>
-          </a:prstGeom>
-          <a:noFill/>
-          <a:ln/>
-        </p:spPr>
-        <p:txBody>
-          <a:bodyPr wrap="square" lIns="0" tIns="0" rIns="0" bIns="0" rtlCol="0" anchor="ctr"/>
-          <a:lstStyle/>
-          <a:p>
-            <a:pPr marL="0" indent="0" algn="ctr">
-              <a:buNone/>
-            </a:pPr>
-            <a:r>
-              <a:rPr lang="en-US" sz="850" b="1" dirty="0">
-                <a:solidFill>
-                  <a:srgbClr val="FF1500"/>
-                </a:solidFill>
-                <a:latin typeface="Arial" pitchFamily="34" charset="0"/>
-                <a:ea typeface="Arial" pitchFamily="34" charset="-122"/>
-                <a:cs typeface="Arial" pitchFamily="34" charset="-120"/>
-              </a:rPr>
-              <a:t>Render zero-API</a:t>
-            </a:r>
-            <a:endParaRPr lang="en-US" sz="850" dirty="0"/>
-          </a:p>
-        </p:txBody>
-      </p:sp>
-      <p:pic>
-        <p:nvPicPr>
-          <p:cNvPr id="13" name="Image 1" descr="preencoded.png"/>
-          <p:cNvPicPr>
-            <a:picLocks noChangeAspect="1"/>
-          </p:cNvPicPr>
-          <p:nvPr/>
-        </p:nvPicPr>
-        <p:blipFill>
-          <a:blip>
-            <a:extLst>
-              <a:ext uri="{96DAC541-7B7A-43D3-8B79-37D633B846F1}">
-                <asvg:svgBlip xmlns:asvg="http://schemas.microsoft.com/office/drawing/2016/SVG/main" r:embed="rId4"/>
-              </a:ext>
-            </a:extLst>
-          </a:blip>
-          <a:stretch>
-            <a:fillRect/>
-          </a:stretch>
-        </p:blipFill>
-        <p:spPr>
-          <a:xfrm>
-            <a:off x="8229600" y="914400"/>
-            <a:ext cx="1371600" cy="1371600"/>
-          </a:xfrm>
-          <a:prstGeom prst="rect">
-            <a:avLst/>
-          </a:prstGeom>
-        </p:spPr>
-      </p:pic>
-      <p:pic>
-        <p:nvPicPr>
-          <p:cNvPr id="14" name="Image 2" descr="preencoded.png"/>
-          <p:cNvPicPr>
-            <a:picLocks noChangeAspect="1"/>
-          </p:cNvPicPr>
-          <p:nvPr/>
-        </p:nvPicPr>
-        <p:blipFill>
-          <a:blip>
-            <a:extLst>
-              <a:ext uri="{96DAC541-7B7A-43D3-8B79-37D633B846F1}">
-                <asvg:svgBlip xmlns:asvg="http://schemas.microsoft.com/office/drawing/2016/SVG/main" r:embed="rId5"/>
-              </a:ext>
-            </a:extLst>
-          </a:blip>
-          <a:stretch>
-            <a:fillRect/>
-          </a:stretch>
-        </p:blipFill>
-        <p:spPr>
-          <a:xfrm>
-            <a:off x="8183880" y="2331720"/>
-            <a:ext cx="2011680" cy="1280160"/>
-          </a:xfrm>
-          <a:prstGeom prst="rect">
-            <a:avLst/>
-          </a:prstGeom>
-        </p:spPr>
-      </p:pic>
-      <p:pic>
-        <p:nvPicPr>
-          <p:cNvPr id="15" name="Image 3" descr="preencoded.png"/>
-          <p:cNvPicPr>
-            <a:picLocks noChangeAspect="1"/>
-          </p:cNvPicPr>
-          <p:nvPr/>
-        </p:nvPicPr>
-        <p:blipFill>
-          <a:blip>
-            <a:extLst>
-              <a:ext uri="{96DAC541-7B7A-43D3-8B79-37D633B846F1}">
-                <asvg:svgBlip xmlns:asvg="http://schemas.microsoft.com/office/drawing/2016/SVG/main" r:embed="rId6"/>
-              </a:ext>
-            </a:extLst>
-          </a:blip>
-          <a:stretch>
-            <a:fillRect/>
-          </a:stretch>
-        </p:blipFill>
-        <p:spPr>
-          <a:xfrm>
-            <a:off x="9281160" y="4069080"/>
-            <a:ext cx="1737360" cy="1234440"/>
-          </a:xfrm>
-          <a:prstGeom prst="rect">
-            <a:avLst/>
-          </a:prstGeom>
-        </p:spPr>
-      </p:pic>
-      <p:sp>
-        <p:nvSpPr>
-          <p:cNvPr id="16" name="Text 10"/>
-          <p:cNvSpPr/>
-          <p:nvPr/>
-        </p:nvSpPr>
-        <p:spPr>
-          <a:xfrm>
-            <a:off x="7178040" y="5806440"/>
-            <a:ext cx="3840480" cy="274320"/>
-          </a:xfrm>
-          <a:prstGeom prst="rect">
-            <a:avLst/>
-          </a:prstGeom>
-          <a:noFill/>
-          <a:ln/>
-        </p:spPr>
-        <p:txBody>
-          <a:bodyPr wrap="square" lIns="0" tIns="0" rIns="0" bIns="0" rtlCol="0" anchor="ctr"/>
-          <a:lstStyle/>
-          <a:p>
-            <a:pPr marL="0" indent="0" algn="r">
-              <a:buNone/>
-            </a:pPr>
-            <a:r>
-              <a:rPr lang="en-US" sz="1100" b="1" dirty="0">
+              <a:t>Author-Generated, DAM-Persisted Firefly Images in Universal Editor</a:t>
+            </a:r>
+          </a:p>
+        </p:txBody>
+      </p:sp>
+      <p:sp>
+        <p:nvSpPr>
+          <p:cNvPr id="5" name="TextBox 4"/>
+          <p:cNvSpPr txBox="1"/>
+          <p:nvPr/>
+        </p:nvSpPr>
+        <p:spPr>
+          <a:xfrm>
+            <a:off x="550228" y="3977639"/>
+            <a:ext cx="7315200" cy="369332"/>
+          </a:xfrm>
+          <a:prstGeom prst="rect">
+            <a:avLst/>
+          </a:prstGeom>
+          <a:noFill/>
+        </p:spPr>
+        <p:txBody>
+          <a:bodyPr wrap="square">
+            <a:spAutoFit/>
+          </a:bodyPr>
+          <a:lstStyle/>
+          <a:p>
+            <a:pPr algn="l"/>
+            <a:r>
+              <a:rPr>
                 <a:solidFill>
                   <a:srgbClr val="FFFFFF"/>
                 </a:solidFill>
               </a:rPr>
-              <a:t>Designed to feel polished, visual, and ready to present</a:t>
-            </a:r>
-            <a:endParaRPr lang="en-US" sz="1100" dirty="0"/>
+              <a:t>Adobe Experience Manager — Developer Guide</a:t>
+            </a:r>
+          </a:p>
+        </p:txBody>
+      </p:sp>
+      <p:sp>
+        <p:nvSpPr>
+          <p:cNvPr id="6" name="TextBox 5"/>
+          <p:cNvSpPr txBox="1"/>
+          <p:nvPr/>
+        </p:nvSpPr>
+        <p:spPr>
+          <a:xfrm>
+            <a:off x="550228" y="1645921"/>
+            <a:ext cx="1828800" cy="430887"/>
+          </a:xfrm>
+          <a:prstGeom prst="rect">
+            <a:avLst/>
+          </a:prstGeom>
+          <a:noFill/>
+        </p:spPr>
+        <p:txBody>
+          <a:bodyPr wrap="square">
+            <a:spAutoFit/>
+          </a:bodyPr>
+          <a:lstStyle/>
+          <a:p>
+            <a:pPr algn="l"/>
+            <a:r>
+              <a:rPr sz="2200" b="1">
+                <a:solidFill>
+                  <a:srgbClr val="FFFFFF"/>
+                </a:solidFill>
+              </a:rPr>
+              <a:t>Adobe</a:t>
+            </a:r>
           </a:p>
         </p:txBody>
       </p:sp>
@@ -10088,15 +9697,7 @@
 
 <file path=ppt/slides/slide16.xml><?xml version="1.0" encoding="utf-8"?>
 <p:sld xmlns:a="http://schemas.openxmlformats.org/drawingml/2006/main" xmlns:r="http://schemas.openxmlformats.org/officeDocument/2006/relationships" xmlns:p="http://schemas.openxmlformats.org/presentationml/2006/main">
-  <p:cSld name="Slide 14">
-    <p:bg>
-      <p:bgPr>
-        <a:solidFill>
-          <a:srgbClr val="141414"/>
-        </a:solidFill>
-        <a:effectLst/>
-      </p:bgPr>
-    </p:bg>
+  <p:cSld>
     <p:spTree>
       <p:nvGrpSpPr>
         <p:cNvPr id="1" name=""/>
@@ -10111,456 +9712,81 @@
           <a:chExt cx="0" cy="0"/>
         </a:xfrm>
       </p:grpSpPr>
-      <p:pic>
-        <p:nvPicPr>
-          <p:cNvPr id="2" name="Image 0" descr="preencoded.png"/>
-          <p:cNvPicPr>
-            <a:picLocks noChangeAspect="1"/>
-          </p:cNvPicPr>
-          <p:nvPr/>
-        </p:nvPicPr>
-        <p:blipFill>
-          <a:blip>
-            <a:extLst>
-              <a:ext uri="{96DAC541-7B7A-43D3-8B79-37D633B846F1}">
-                <asvg:svgBlip xmlns:asvg="http://schemas.microsoft.com/office/drawing/2016/SVG/main" r:embed="rId3"/>
-              </a:ext>
-            </a:extLst>
-          </a:blip>
-          <a:stretch>
-            <a:fillRect/>
-          </a:stretch>
-        </p:blipFill>
-        <p:spPr>
-          <a:xfrm>
-            <a:off x="0" y="0"/>
-            <a:ext cx="12191695" cy="6858000"/>
-          </a:xfrm>
-          <a:prstGeom prst="rect">
-            <a:avLst/>
-          </a:prstGeom>
-        </p:spPr>
-      </p:pic>
-      <p:sp>
-        <p:nvSpPr>
-          <p:cNvPr id="3" name="Text 0"/>
-          <p:cNvSpPr/>
-          <p:nvPr/>
-        </p:nvSpPr>
-        <p:spPr>
-          <a:xfrm>
-            <a:off x="914400" y="2011680"/>
-            <a:ext cx="3474720" cy="457200"/>
-          </a:xfrm>
-          <a:prstGeom prst="rect">
-            <a:avLst/>
-          </a:prstGeom>
-          <a:noFill/>
-          <a:ln/>
-        </p:spPr>
-        <p:txBody>
-          <a:bodyPr wrap="square" lIns="0" tIns="0" rIns="0" bIns="0" rtlCol="0" anchor="ctr"/>
-          <a:lstStyle/>
-          <a:p>
-            <a:pPr marL="0" indent="0">
-              <a:buNone/>
-            </a:pPr>
-            <a:r>
-              <a:rPr lang="en-US" sz="2800" b="1" dirty="0">
+      <p:sp>
+        <p:nvSpPr>
+          <p:cNvPr id="2" name="Rectangle 1"/>
+          <p:cNvSpPr/>
+          <p:nvPr/>
+        </p:nvSpPr>
+        <p:spPr>
+          <a:xfrm>
+            <a:off x="1588" y="0"/>
+            <a:ext cx="12188952" cy="6858000"/>
+          </a:xfrm>
+          <a:prstGeom prst="rect">
+            <a:avLst/>
+          </a:prstGeom>
+          <a:solidFill>
+            <a:srgbClr val="FF0000"/>
+          </a:solidFill>
+          <a:ln>
+            <a:noFill/>
+          </a:ln>
+        </p:spPr>
+        <p:style>
+          <a:lnRef idx="1">
+            <a:schemeClr val="accent1"/>
+          </a:lnRef>
+          <a:fillRef idx="3">
+            <a:schemeClr val="accent1"/>
+          </a:fillRef>
+          <a:effectRef idx="2">
+            <a:schemeClr val="accent1"/>
+          </a:effectRef>
+          <a:fontRef idx="minor">
+            <a:schemeClr val="lt1"/>
+          </a:fontRef>
+        </p:style>
+        <p:txBody>
+          <a:bodyPr rtlCol="0" anchor="ctr"/>
+          <a:lstStyle/>
+          <a:p>
+            <a:pPr algn="ctr"/>
+            <a:endParaRPr/>
+          </a:p>
+        </p:txBody>
+      </p:sp>
+      <p:sp>
+        <p:nvSpPr>
+          <p:cNvPr id="3" name="TextBox 2"/>
+          <p:cNvSpPr txBox="1"/>
+          <p:nvPr/>
+        </p:nvSpPr>
+        <p:spPr>
+          <a:xfrm>
+            <a:off x="5396548" y="3017520"/>
+            <a:ext cx="1463040" cy="553998"/>
+          </a:xfrm>
+          <a:prstGeom prst="rect">
+            <a:avLst/>
+          </a:prstGeom>
+          <a:noFill/>
+        </p:spPr>
+        <p:txBody>
+          <a:bodyPr wrap="square">
+            <a:spAutoFit/>
+          </a:bodyPr>
+          <a:lstStyle/>
+          <a:p>
+            <a:pPr algn="ctr"/>
+            <a:r>
+              <a:rPr sz="3000" b="1">
                 <a:solidFill>
                   <a:srgbClr val="FFFFFF"/>
                 </a:solidFill>
               </a:rPr>
-              <a:t>persist once</a:t>
-            </a:r>
-            <a:endParaRPr lang="en-US" sz="2800" dirty="0"/>
-          </a:p>
-        </p:txBody>
-      </p:sp>
-      <p:sp>
-        <p:nvSpPr>
-          <p:cNvPr id="4" name="Text 1"/>
-          <p:cNvSpPr/>
-          <p:nvPr/>
-        </p:nvSpPr>
-        <p:spPr>
-          <a:xfrm>
-            <a:off x="914400" y="2560320"/>
-            <a:ext cx="3474720" cy="457200"/>
-          </a:xfrm>
-          <a:prstGeom prst="rect">
-            <a:avLst/>
-          </a:prstGeom>
-          <a:noFill/>
-          <a:ln/>
-        </p:spPr>
-        <p:txBody>
-          <a:bodyPr wrap="square" lIns="0" tIns="0" rIns="0" bIns="0" rtlCol="0" anchor="ctr"/>
-          <a:lstStyle/>
-          <a:p>
-            <a:pPr marL="0" indent="0">
-              <a:buNone/>
-            </a:pPr>
-            <a:r>
-              <a:rPr lang="en-US" sz="2800" b="1" dirty="0">
-                <a:solidFill>
-                  <a:srgbClr val="FFFFFF"/>
-                </a:solidFill>
-              </a:rPr>
-              <a:t>render many</a:t>
-            </a:r>
-            <a:endParaRPr lang="en-US" sz="2800" dirty="0"/>
-          </a:p>
-        </p:txBody>
-      </p:sp>
-      <p:sp>
-        <p:nvSpPr>
-          <p:cNvPr id="5" name="Text 2"/>
-          <p:cNvSpPr/>
-          <p:nvPr/>
-        </p:nvSpPr>
-        <p:spPr>
-          <a:xfrm>
-            <a:off x="914400" y="3246120"/>
-            <a:ext cx="5303520" cy="256032"/>
-          </a:xfrm>
-          <a:prstGeom prst="rect">
-            <a:avLst/>
-          </a:prstGeom>
-          <a:noFill/>
-          <a:ln/>
-        </p:spPr>
-        <p:txBody>
-          <a:bodyPr wrap="square" lIns="0" tIns="0" rIns="0" bIns="0" rtlCol="0" anchor="ctr"/>
-          <a:lstStyle/>
-          <a:p>
-            <a:pPr marL="0" indent="0">
-              <a:buNone/>
-            </a:pPr>
-            <a:r>
-              <a:rPr lang="en-US" sz="1250" dirty="0">
-                <a:solidFill>
-                  <a:srgbClr val="FFECE9"/>
-                </a:solidFill>
-              </a:rPr>
-              <a:t>A polished way to explain the ai-image block to the Adobe team</a:t>
-            </a:r>
-            <a:endParaRPr lang="en-US" sz="1250" dirty="0"/>
-          </a:p>
-        </p:txBody>
-      </p:sp>
-      <p:sp>
-        <p:nvSpPr>
-          <p:cNvPr id="6" name="Shape 3"/>
-          <p:cNvSpPr/>
-          <p:nvPr/>
-        </p:nvSpPr>
-        <p:spPr>
-          <a:xfrm>
-            <a:off x="914400" y="3886200"/>
-            <a:ext cx="1417320" cy="274320"/>
-          </a:xfrm>
-          <a:prstGeom prst="roundRect">
-            <a:avLst>
-              <a:gd name="adj" fmla="val 26667"/>
-            </a:avLst>
-          </a:prstGeom>
-          <a:solidFill>
-            <a:srgbClr val="FFFFFF"/>
-          </a:solidFill>
-          <a:ln w="12700">
-            <a:solidFill>
-              <a:srgbClr val="FFFFFF"/>
-            </a:solidFill>
-            <a:prstDash val="solid"/>
-          </a:ln>
-        </p:spPr>
-        <p:txBody>
-          <a:bodyPr/>
-          <a:lstStyle/>
-          <a:p>
-            <a:endParaRPr lang="en-US"/>
-          </a:p>
-        </p:txBody>
-      </p:sp>
-      <p:sp>
-        <p:nvSpPr>
-          <p:cNvPr id="7" name="Text 4"/>
-          <p:cNvSpPr/>
-          <p:nvPr/>
-        </p:nvSpPr>
-        <p:spPr>
-          <a:xfrm>
-            <a:off x="914400" y="3890772"/>
-            <a:ext cx="1417320" cy="274320"/>
-          </a:xfrm>
-          <a:prstGeom prst="rect">
-            <a:avLst/>
-          </a:prstGeom>
-          <a:noFill/>
-          <a:ln/>
-        </p:spPr>
-        <p:txBody>
-          <a:bodyPr wrap="square" lIns="0" tIns="0" rIns="0" bIns="0" rtlCol="0" anchor="ctr"/>
-          <a:lstStyle/>
-          <a:p>
-            <a:pPr marL="0" indent="0" algn="ctr">
-              <a:buNone/>
-            </a:pPr>
-            <a:r>
-              <a:rPr lang="en-US" sz="850" b="1" dirty="0">
-                <a:solidFill>
-                  <a:srgbClr val="FF1500"/>
-                </a:solidFill>
-                <a:latin typeface="Arial" pitchFamily="34" charset="0"/>
-                <a:ea typeface="Arial" pitchFamily="34" charset="-122"/>
-                <a:cs typeface="Arial" pitchFamily="34" charset="-120"/>
-              </a:rPr>
-              <a:t>authoring</a:t>
-            </a:r>
-            <a:endParaRPr lang="en-US" sz="850" dirty="0"/>
-          </a:p>
-        </p:txBody>
-      </p:sp>
-      <p:sp>
-        <p:nvSpPr>
-          <p:cNvPr id="8" name="Shape 5"/>
-          <p:cNvSpPr/>
-          <p:nvPr/>
-        </p:nvSpPr>
-        <p:spPr>
-          <a:xfrm>
-            <a:off x="2487168" y="3886200"/>
-            <a:ext cx="1188720" cy="274320"/>
-          </a:xfrm>
-          <a:prstGeom prst="roundRect">
-            <a:avLst>
-              <a:gd name="adj" fmla="val 26667"/>
-            </a:avLst>
-          </a:prstGeom>
-          <a:solidFill>
-            <a:srgbClr val="FFFFFF"/>
-          </a:solidFill>
-          <a:ln w="12700">
-            <a:solidFill>
-              <a:srgbClr val="FFFFFF"/>
-            </a:solidFill>
-            <a:prstDash val="solid"/>
-          </a:ln>
-        </p:spPr>
-        <p:txBody>
-          <a:bodyPr/>
-          <a:lstStyle/>
-          <a:p>
-            <a:endParaRPr lang="en-US"/>
-          </a:p>
-        </p:txBody>
-      </p:sp>
-      <p:sp>
-        <p:nvSpPr>
-          <p:cNvPr id="9" name="Text 6"/>
-          <p:cNvSpPr/>
-          <p:nvPr/>
-        </p:nvSpPr>
-        <p:spPr>
-          <a:xfrm>
-            <a:off x="2487168" y="3890772"/>
-            <a:ext cx="1188720" cy="274320"/>
-          </a:xfrm>
-          <a:prstGeom prst="rect">
-            <a:avLst/>
-          </a:prstGeom>
-          <a:noFill/>
-          <a:ln/>
-        </p:spPr>
-        <p:txBody>
-          <a:bodyPr wrap="square" lIns="0" tIns="0" rIns="0" bIns="0" rtlCol="0" anchor="ctr"/>
-          <a:lstStyle/>
-          <a:p>
-            <a:pPr marL="0" indent="0" algn="ctr">
-              <a:buNone/>
-            </a:pPr>
-            <a:r>
-              <a:rPr lang="en-US" sz="850" b="1" dirty="0">
-                <a:solidFill>
-                  <a:srgbClr val="FF1500"/>
-                </a:solidFill>
-                <a:latin typeface="Arial" pitchFamily="34" charset="0"/>
-                <a:ea typeface="Arial" pitchFamily="34" charset="-122"/>
-                <a:cs typeface="Arial" pitchFamily="34" charset="-120"/>
-              </a:rPr>
-              <a:t>DAM</a:t>
-            </a:r>
-            <a:endParaRPr lang="en-US" sz="850" dirty="0"/>
-          </a:p>
-        </p:txBody>
-      </p:sp>
-      <p:sp>
-        <p:nvSpPr>
-          <p:cNvPr id="10" name="Shape 7"/>
-          <p:cNvSpPr/>
-          <p:nvPr/>
-        </p:nvSpPr>
-        <p:spPr>
-          <a:xfrm>
-            <a:off x="3840480" y="3886200"/>
-            <a:ext cx="1417320" cy="274320"/>
-          </a:xfrm>
-          <a:prstGeom prst="roundRect">
-            <a:avLst>
-              <a:gd name="adj" fmla="val 26667"/>
-            </a:avLst>
-          </a:prstGeom>
-          <a:solidFill>
-            <a:srgbClr val="FFFFFF"/>
-          </a:solidFill>
-          <a:ln w="12700">
-            <a:solidFill>
-              <a:srgbClr val="FFFFFF"/>
-            </a:solidFill>
-            <a:prstDash val="solid"/>
-          </a:ln>
-        </p:spPr>
-        <p:txBody>
-          <a:bodyPr/>
-          <a:lstStyle/>
-          <a:p>
-            <a:endParaRPr lang="en-US"/>
-          </a:p>
-        </p:txBody>
-      </p:sp>
-      <p:sp>
-        <p:nvSpPr>
-          <p:cNvPr id="11" name="Text 8"/>
-          <p:cNvSpPr/>
-          <p:nvPr/>
-        </p:nvSpPr>
-        <p:spPr>
-          <a:xfrm>
-            <a:off x="3840480" y="3890772"/>
-            <a:ext cx="1417320" cy="274320"/>
-          </a:xfrm>
-          <a:prstGeom prst="rect">
-            <a:avLst/>
-          </a:prstGeom>
-          <a:noFill/>
-          <a:ln/>
-        </p:spPr>
-        <p:txBody>
-          <a:bodyPr wrap="square" lIns="0" tIns="0" rIns="0" bIns="0" rtlCol="0" anchor="ctr"/>
-          <a:lstStyle/>
-          <a:p>
-            <a:pPr marL="0" indent="0" algn="ctr">
-              <a:buNone/>
-            </a:pPr>
-            <a:r>
-              <a:rPr lang="en-US" sz="850" b="1" dirty="0">
-                <a:solidFill>
-                  <a:srgbClr val="FF1500"/>
-                </a:solidFill>
-                <a:latin typeface="Arial" pitchFamily="34" charset="0"/>
-                <a:ea typeface="Arial" pitchFamily="34" charset="-122"/>
-                <a:cs typeface="Arial" pitchFamily="34" charset="-120"/>
-              </a:rPr>
-              <a:t>zero API</a:t>
-            </a:r>
-            <a:endParaRPr lang="en-US" sz="850" dirty="0"/>
-          </a:p>
-        </p:txBody>
-      </p:sp>
-      <p:pic>
-        <p:nvPicPr>
-          <p:cNvPr id="12" name="Image 1" descr="preencoded.png"/>
-          <p:cNvPicPr>
-            <a:picLocks noChangeAspect="1"/>
-          </p:cNvPicPr>
-          <p:nvPr/>
-        </p:nvPicPr>
-        <p:blipFill>
-          <a:blip>
-            <a:extLst>
-              <a:ext uri="{96DAC541-7B7A-43D3-8B79-37D633B846F1}">
-                <asvg:svgBlip xmlns:asvg="http://schemas.microsoft.com/office/drawing/2016/SVG/main" r:embed="rId4"/>
-              </a:ext>
-            </a:extLst>
-          </a:blip>
-          <a:stretch>
-            <a:fillRect/>
-          </a:stretch>
-        </p:blipFill>
-        <p:spPr>
-          <a:xfrm>
-            <a:off x="8915400" y="1371600"/>
-            <a:ext cx="1463040" cy="1463040"/>
-          </a:xfrm>
-          <a:prstGeom prst="rect">
-            <a:avLst/>
-          </a:prstGeom>
-        </p:spPr>
-      </p:pic>
-      <p:pic>
-        <p:nvPicPr>
-          <p:cNvPr id="13" name="Image 2" descr="preencoded.png"/>
-          <p:cNvPicPr>
-            <a:picLocks noChangeAspect="1"/>
-          </p:cNvPicPr>
-          <p:nvPr/>
-        </p:nvPicPr>
-        <p:blipFill>
-          <a:blip>
-            <a:extLst>
-              <a:ext uri="{96DAC541-7B7A-43D3-8B79-37D633B846F1}">
-                <asvg:svgBlip xmlns:asvg="http://schemas.microsoft.com/office/drawing/2016/SVG/main" r:embed="rId5"/>
-              </a:ext>
-            </a:extLst>
-          </a:blip>
-          <a:stretch>
-            <a:fillRect/>
-          </a:stretch>
-        </p:blipFill>
-        <p:spPr>
-          <a:xfrm>
-            <a:off x="8732520" y="3063240"/>
-            <a:ext cx="1828800" cy="1280160"/>
-          </a:xfrm>
-          <a:prstGeom prst="rect">
-            <a:avLst/>
-          </a:prstGeom>
-        </p:spPr>
-      </p:pic>
-      <p:sp>
-        <p:nvSpPr>
-          <p:cNvPr id="14" name="Text 9"/>
-          <p:cNvSpPr/>
-          <p:nvPr/>
-        </p:nvSpPr>
-        <p:spPr>
-          <a:xfrm>
-            <a:off x="9326880" y="6217920"/>
-            <a:ext cx="2194560" cy="164592"/>
-          </a:xfrm>
-          <a:prstGeom prst="rect">
-            <a:avLst/>
-          </a:prstGeom>
-          <a:noFill/>
-          <a:ln/>
-        </p:spPr>
-        <p:txBody>
-          <a:bodyPr wrap="square" lIns="0" tIns="0" rIns="0" bIns="0" rtlCol="0" anchor="ctr"/>
-          <a:lstStyle/>
-          <a:p>
-            <a:pPr marL="0" indent="0" algn="r">
-              <a:buNone/>
-            </a:pPr>
-            <a:r>
-              <a:rPr lang="en-US" sz="850" dirty="0">
-                <a:solidFill>
-                  <a:srgbClr val="BDBDBD"/>
-                </a:solidFill>
-              </a:rPr>
-              <a:t>Adobe Confidential</a:t>
-            </a:r>
-            <a:endParaRPr lang="en-US" sz="850" dirty="0"/>
+              <a:t>Adobe</a:t>
+            </a:r>
           </a:p>
         </p:txBody>
       </p:sp>
@@ -10618,8 +9844,12 @@
           <a:lstStyle/>
           <a:p>
             <a:r>
+              <a:rPr lang="en-US" b="1" dirty="0"/>
+              <a:t>Org</a:t>
+            </a:r>
+            <a:r>
               <a:rPr lang="en-US" dirty="0"/>
-              <a:t>Org </a:t>
+              <a:t> </a:t>
             </a:r>
           </a:p>
           <a:p>
